--- a/~sasano/lecture/fpl/26/fpl11-sup.pptx
+++ b/~sasano/lecture/fpl/26/fpl11-sup.pptx
@@ -305,7 +305,7 @@
           <a:p>
             <a:fld id="{01AC0B91-4105-FC41-AF23-562AED5B73ED}" type="datetimeFigureOut">
               <a:rPr kumimoji="1" lang="ja-JP" altLang="en-US" smtClean="0"/>
-              <a:t>2021/9/29</a:t>
+              <a:t>2026/9/30</a:t>
             </a:fld>
             <a:endParaRPr kumimoji="1" lang="ja-JP" altLang="en-US"/>
           </a:p>
@@ -505,7 +505,7 @@
           <a:p>
             <a:fld id="{01AC0B91-4105-FC41-AF23-562AED5B73ED}" type="datetimeFigureOut">
               <a:rPr kumimoji="1" lang="ja-JP" altLang="en-US" smtClean="0"/>
-              <a:t>2021/9/29</a:t>
+              <a:t>2026/9/30</a:t>
             </a:fld>
             <a:endParaRPr kumimoji="1" lang="ja-JP" altLang="en-US"/>
           </a:p>
@@ -715,7 +715,7 @@
           <a:p>
             <a:fld id="{01AC0B91-4105-FC41-AF23-562AED5B73ED}" type="datetimeFigureOut">
               <a:rPr kumimoji="1" lang="ja-JP" altLang="en-US" smtClean="0"/>
-              <a:t>2021/9/29</a:t>
+              <a:t>2026/9/30</a:t>
             </a:fld>
             <a:endParaRPr kumimoji="1" lang="ja-JP" altLang="en-US"/>
           </a:p>
@@ -915,7 +915,7 @@
           <a:p>
             <a:fld id="{01AC0B91-4105-FC41-AF23-562AED5B73ED}" type="datetimeFigureOut">
               <a:rPr kumimoji="1" lang="ja-JP" altLang="en-US" smtClean="0"/>
-              <a:t>2021/9/29</a:t>
+              <a:t>2026/9/30</a:t>
             </a:fld>
             <a:endParaRPr kumimoji="1" lang="ja-JP" altLang="en-US"/>
           </a:p>
@@ -1160,7 +1160,7 @@
           <a:p>
             <a:fld id="{01AC0B91-4105-FC41-AF23-562AED5B73ED}" type="datetimeFigureOut">
               <a:rPr kumimoji="1" lang="ja-JP" altLang="en-US" smtClean="0"/>
-              <a:t>2021/9/29</a:t>
+              <a:t>2026/9/30</a:t>
             </a:fld>
             <a:endParaRPr kumimoji="1" lang="ja-JP" altLang="en-US"/>
           </a:p>
@@ -1509,7 +1509,7 @@
           <a:p>
             <a:fld id="{01AC0B91-4105-FC41-AF23-562AED5B73ED}" type="datetimeFigureOut">
               <a:rPr kumimoji="1" lang="ja-JP" altLang="en-US" smtClean="0"/>
-              <a:t>2021/9/29</a:t>
+              <a:t>2026/9/30</a:t>
             </a:fld>
             <a:endParaRPr kumimoji="1" lang="ja-JP" altLang="en-US"/>
           </a:p>
@@ -1992,7 +1992,7 @@
           <a:p>
             <a:fld id="{01AC0B91-4105-FC41-AF23-562AED5B73ED}" type="datetimeFigureOut">
               <a:rPr kumimoji="1" lang="ja-JP" altLang="en-US" smtClean="0"/>
-              <a:t>2021/9/29</a:t>
+              <a:t>2026/9/30</a:t>
             </a:fld>
             <a:endParaRPr kumimoji="1" lang="ja-JP" altLang="en-US"/>
           </a:p>
@@ -2109,7 +2109,7 @@
           <a:p>
             <a:fld id="{01AC0B91-4105-FC41-AF23-562AED5B73ED}" type="datetimeFigureOut">
               <a:rPr kumimoji="1" lang="ja-JP" altLang="en-US" smtClean="0"/>
-              <a:t>2021/9/29</a:t>
+              <a:t>2026/9/30</a:t>
             </a:fld>
             <a:endParaRPr kumimoji="1" lang="ja-JP" altLang="en-US"/>
           </a:p>
@@ -2204,7 +2204,7 @@
           <a:p>
             <a:fld id="{01AC0B91-4105-FC41-AF23-562AED5B73ED}" type="datetimeFigureOut">
               <a:rPr kumimoji="1" lang="ja-JP" altLang="en-US" smtClean="0"/>
-              <a:t>2021/9/29</a:t>
+              <a:t>2026/9/30</a:t>
             </a:fld>
             <a:endParaRPr kumimoji="1" lang="ja-JP" altLang="en-US"/>
           </a:p>
@@ -2511,7 +2511,7 @@
           <a:p>
             <a:fld id="{01AC0B91-4105-FC41-AF23-562AED5B73ED}" type="datetimeFigureOut">
               <a:rPr kumimoji="1" lang="ja-JP" altLang="en-US" smtClean="0"/>
-              <a:t>2021/9/29</a:t>
+              <a:t>2026/9/30</a:t>
             </a:fld>
             <a:endParaRPr kumimoji="1" lang="ja-JP" altLang="en-US"/>
           </a:p>
@@ -2763,7 +2763,7 @@
           <a:p>
             <a:fld id="{01AC0B91-4105-FC41-AF23-562AED5B73ED}" type="datetimeFigureOut">
               <a:rPr kumimoji="1" lang="ja-JP" altLang="en-US" smtClean="0"/>
-              <a:t>2021/9/29</a:t>
+              <a:t>2026/9/30</a:t>
             </a:fld>
             <a:endParaRPr kumimoji="1" lang="ja-JP" altLang="en-US"/>
           </a:p>
@@ -3006,7 +3006,7 @@
           <a:p>
             <a:fld id="{01AC0B91-4105-FC41-AF23-562AED5B73ED}" type="datetimeFigureOut">
               <a:rPr kumimoji="1" lang="ja-JP" altLang="en-US" smtClean="0"/>
-              <a:t>2021/9/29</a:t>
+              <a:t>2026/9/30</a:t>
             </a:fld>
             <a:endParaRPr kumimoji="1" lang="ja-JP" altLang="en-US"/>
           </a:p>
@@ -3467,56 +3467,6 @@
                 <a:schemeClr val="tx1"/>
               </a:solidFill>
             </a:endParaRPr>
-          </a:p>
-        </p:txBody>
-      </p:sp>
-      <p:sp>
-        <p:nvSpPr>
-          <p:cNvPr id="7" name="テキスト ボックス 6"/>
-          <p:cNvSpPr txBox="1"/>
-          <p:nvPr/>
-        </p:nvSpPr>
-        <p:spPr>
-          <a:xfrm>
-            <a:off x="755576" y="4365104"/>
-            <a:ext cx="7776863" cy="1077218"/>
-          </a:xfrm>
-          <a:prstGeom prst="rect">
-            <a:avLst/>
-          </a:prstGeom>
-          <a:noFill/>
-        </p:spPr>
-        <p:txBody>
-          <a:bodyPr wrap="square" rtlCol="0">
-            <a:spAutoFit/>
-          </a:bodyPr>
-          <a:lstStyle/>
-          <a:p>
-            <a:pPr algn="ctr"/>
-            <a:r>
-              <a:rPr kumimoji="1" lang="en-US" altLang="ja-JP" sz="3200" b="0" dirty="0"/>
-              <a:t>Department of </a:t>
-            </a:r>
-          </a:p>
-          <a:p>
-            <a:pPr algn="ctr"/>
-            <a:r>
-              <a:rPr lang="en-US" altLang="ja-JP" sz="3200" dirty="0"/>
-              <a:t>Computer</a:t>
-            </a:r>
-            <a:r>
-              <a:rPr kumimoji="1" lang="en-US" altLang="ja-JP" sz="3200" b="0" dirty="0"/>
-              <a:t> Science and </a:t>
-            </a:r>
-            <a:r>
-              <a:rPr lang="en-US" altLang="ja-JP" sz="3200" b="0" dirty="0"/>
-              <a:t>Engineering</a:t>
-            </a:r>
-            <a:r>
-              <a:rPr kumimoji="1" lang="en-US" altLang="ja-JP" sz="3200" b="0" dirty="0"/>
-              <a:t> </a:t>
-            </a:r>
-            <a:endParaRPr kumimoji="1" lang="ja-JP" altLang="en-US" sz="3200" b="0" dirty="0"/>
           </a:p>
         </p:txBody>
       </p:sp>
